--- a/dist/초4/영어/이해와상호작용/초4_영어_이해와상호작용_03_시각묻고답하기.pptx
+++ b/dist/초4/영어/이해와상호작용/초4_영어_이해와상호작용_03_시각묻고답하기.pptx
@@ -120,20 +120,20 @@
   <p:extLst>
     <p:ext uri="{521415D9-36F7-43E2-AB2F-B90AF26B5E84}">
       <p14:sectionLst xmlns:p14="http://schemas.microsoft.com/office/powerpoint/2010/main">
-        <p14:section name="도입" id="{534df5bd-70b1-f74f-1974-51365db73a8c}">
+        <p14:section name="도입" id="{fe9a1283-adbd-d9dc-940f-c1e1f718dfa0}">
           <p14:sldIdLst>
             <p14:sldId id="256"/>
             <p14:sldId id="257"/>
           </p14:sldIdLst>
         </p14:section>
-        <p14:section name="개념" id="{17bfe81c-4bac-4db6-806c-89904618aea5}">
+        <p14:section name="개념" id="{56ef2460-ded4-6bb7-4fb8-a80184fb2f80}">
           <p14:sldIdLst>
             <p14:sldId id="258"/>
             <p14:sldId id="259"/>
             <p14:sldId id="260"/>
           </p14:sldIdLst>
         </p14:section>
-        <p14:section name="연습" id="{5e18cb8e-ab3a-baa2-d20a-69bd671b65bc}">
+        <p14:section name="연습" id="{ae2fe826-8ab6-1b06-e89c-f97df954974e}">
           <p14:sldIdLst>
             <p14:sldId id="261"/>
             <p14:sldId id="262"/>
@@ -141,19 +141,19 @@
             <p14:sldId id="264"/>
           </p14:sldIdLst>
         </p14:section>
-        <p14:section name="확인" id="{38551df3-a06a-e195-a729-13736be66ee3}">
+        <p14:section name="확인" id="{205e5a04-3ee5-3a04-5be2-f6013bcb4af2}">
           <p14:sldIdLst>
             <p14:sldId id="265"/>
             <p14:sldId id="266"/>
             <p14:sldId id="267"/>
           </p14:sldIdLst>
         </p14:section>
-        <p14:section name="정리" id="{85bf3575-a90d-5fde-73e8-ff9c11a78356}">
+        <p14:section name="정리" id="{627d0e6b-1408-4148-f5f0-c030379dd076}">
           <p14:sldIdLst>
             <p14:sldId id="268"/>
           </p14:sldIdLst>
         </p14:section>
-        <p14:section name="보충" id="{57d0d9ff-c3c7-1074-0b8b-52e0304836a0}">
+        <p14:section name="보충" id="{f8a52698-d1fd-9951-56c8-e4dd07a7db9d}">
           <p14:sldIdLst>
             <p14:sldId id="269"/>
           </p14:sldIdLst>
